--- a/livro_ia_educacao/saida/pptx/Cap17_slides.pptx
+++ b/livro_ia_educacao/saida/pptx/Cap17_slides.pptx
@@ -9785,11 +9785,11 @@
         <p:spPr>
           <a:xfrm>
             <a:off x="548640" y="1417320"/>
-            <a:ext cx="11064240" cy="762000"/>
+            <a:ext cx="11064240" cy="682752"/>
           </a:xfrm>
           <a:prstGeom prst="roundRect">
             <a:avLst>
-              <a:gd name="adj" fmla="val 14400"/>
+              <a:gd name="adj" fmla="val 16071"/>
             </a:avLst>
           </a:prstGeom>
           <a:solidFill>
@@ -9816,7 +9816,7 @@
         <p:spPr>
           <a:xfrm>
             <a:off x="731520" y="1417320"/>
-            <a:ext cx="548640" cy="762000"/>
+            <a:ext cx="548640" cy="682752"/>
           </a:xfrm>
           <a:prstGeom prst="rect">
             <a:avLst/>
@@ -9852,7 +9852,7 @@
         <p:spPr>
           <a:xfrm>
             <a:off x="1463040" y="1417320"/>
-            <a:ext cx="9966960" cy="762000"/>
+            <a:ext cx="9966960" cy="682752"/>
           </a:xfrm>
           <a:prstGeom prst="rect">
             <a:avLst/>
@@ -9887,12 +9887,12 @@
         </p:nvSpPr>
         <p:spPr>
           <a:xfrm>
-            <a:off x="548640" y="2289048"/>
-            <a:ext cx="11064240" cy="762000"/>
+            <a:off x="548640" y="2209800"/>
+            <a:ext cx="11064240" cy="682752"/>
           </a:xfrm>
           <a:prstGeom prst="roundRect">
             <a:avLst>
-              <a:gd name="adj" fmla="val 14400"/>
+              <a:gd name="adj" fmla="val 16071"/>
             </a:avLst>
           </a:prstGeom>
           <a:solidFill>
@@ -9918,8 +9918,8 @@
         </p:nvSpPr>
         <p:spPr>
           <a:xfrm>
-            <a:off x="731520" y="2289048"/>
-            <a:ext cx="548640" cy="762000"/>
+            <a:off x="731520" y="2209800"/>
+            <a:ext cx="548640" cy="682752"/>
           </a:xfrm>
           <a:prstGeom prst="rect">
             <a:avLst/>
@@ -9954,8 +9954,8 @@
         </p:nvSpPr>
         <p:spPr>
           <a:xfrm>
-            <a:off x="1463040" y="2289048"/>
-            <a:ext cx="9966960" cy="762000"/>
+            <a:off x="1463040" y="2209800"/>
+            <a:ext cx="9966960" cy="682752"/>
           </a:xfrm>
           <a:prstGeom prst="rect">
             <a:avLst/>
@@ -9990,12 +9990,12 @@
         </p:nvSpPr>
         <p:spPr>
           <a:xfrm>
-            <a:off x="548640" y="3160776"/>
-            <a:ext cx="11064240" cy="762000"/>
+            <a:off x="548640" y="3002280"/>
+            <a:ext cx="11064240" cy="682752"/>
           </a:xfrm>
           <a:prstGeom prst="roundRect">
             <a:avLst>
-              <a:gd name="adj" fmla="val 14400"/>
+              <a:gd name="adj" fmla="val 16071"/>
             </a:avLst>
           </a:prstGeom>
           <a:solidFill>
@@ -10021,8 +10021,8 @@
         </p:nvSpPr>
         <p:spPr>
           <a:xfrm>
-            <a:off x="731520" y="3160776"/>
-            <a:ext cx="548640" cy="762000"/>
+            <a:off x="731520" y="3002280"/>
+            <a:ext cx="548640" cy="682752"/>
           </a:xfrm>
           <a:prstGeom prst="rect">
             <a:avLst/>
@@ -10057,8 +10057,8 @@
         </p:nvSpPr>
         <p:spPr>
           <a:xfrm>
-            <a:off x="1463040" y="3160776"/>
-            <a:ext cx="9966960" cy="762000"/>
+            <a:off x="1463040" y="3002280"/>
+            <a:ext cx="9966960" cy="682752"/>
           </a:xfrm>
           <a:prstGeom prst="rect">
             <a:avLst/>
@@ -10093,12 +10093,12 @@
         </p:nvSpPr>
         <p:spPr>
           <a:xfrm>
-            <a:off x="548640" y="4032504"/>
-            <a:ext cx="11064240" cy="762000"/>
+            <a:off x="548640" y="3794760"/>
+            <a:ext cx="11064240" cy="682752"/>
           </a:xfrm>
           <a:prstGeom prst="roundRect">
             <a:avLst>
-              <a:gd name="adj" fmla="val 14400"/>
+              <a:gd name="adj" fmla="val 16071"/>
             </a:avLst>
           </a:prstGeom>
           <a:solidFill>
@@ -10124,8 +10124,8 @@
         </p:nvSpPr>
         <p:spPr>
           <a:xfrm>
-            <a:off x="731520" y="4032504"/>
-            <a:ext cx="548640" cy="762000"/>
+            <a:off x="731520" y="3794760"/>
+            <a:ext cx="548640" cy="682752"/>
           </a:xfrm>
           <a:prstGeom prst="rect">
             <a:avLst/>
@@ -10160,8 +10160,8 @@
         </p:nvSpPr>
         <p:spPr>
           <a:xfrm>
-            <a:off x="1463040" y="4032504"/>
-            <a:ext cx="9966960" cy="762000"/>
+            <a:off x="1463040" y="3794760"/>
+            <a:ext cx="9966960" cy="682752"/>
           </a:xfrm>
           <a:prstGeom prst="rect">
             <a:avLst/>
@@ -10196,12 +10196,12 @@
         </p:nvSpPr>
         <p:spPr>
           <a:xfrm>
-            <a:off x="548640" y="4904232"/>
-            <a:ext cx="11064240" cy="762000"/>
+            <a:off x="548640" y="4587240"/>
+            <a:ext cx="11064240" cy="682752"/>
           </a:xfrm>
           <a:prstGeom prst="roundRect">
             <a:avLst>
-              <a:gd name="adj" fmla="val 14400"/>
+              <a:gd name="adj" fmla="val 16071"/>
             </a:avLst>
           </a:prstGeom>
           <a:solidFill>
@@ -10227,8 +10227,8 @@
         </p:nvSpPr>
         <p:spPr>
           <a:xfrm>
-            <a:off x="731520" y="4904232"/>
-            <a:ext cx="548640" cy="762000"/>
+            <a:off x="731520" y="4587240"/>
+            <a:ext cx="548640" cy="682752"/>
           </a:xfrm>
           <a:prstGeom prst="rect">
             <a:avLst/>
@@ -10263,8 +10263,8 @@
         </p:nvSpPr>
         <p:spPr>
           <a:xfrm>
-            <a:off x="1463040" y="4904232"/>
-            <a:ext cx="9966960" cy="762000"/>
+            <a:off x="1463040" y="4587240"/>
+            <a:ext cx="9966960" cy="682752"/>
           </a:xfrm>
           <a:prstGeom prst="rect">
             <a:avLst/>
@@ -10299,12 +10299,12 @@
         </p:nvSpPr>
         <p:spPr>
           <a:xfrm>
-            <a:off x="548640" y="5775960"/>
-            <a:ext cx="11064240" cy="762000"/>
+            <a:off x="548640" y="5379720"/>
+            <a:ext cx="11064240" cy="682752"/>
           </a:xfrm>
           <a:prstGeom prst="roundRect">
             <a:avLst>
-              <a:gd name="adj" fmla="val 14400"/>
+              <a:gd name="adj" fmla="val 16071"/>
             </a:avLst>
           </a:prstGeom>
           <a:solidFill>
@@ -10330,8 +10330,8 @@
         </p:nvSpPr>
         <p:spPr>
           <a:xfrm>
-            <a:off x="731520" y="5775960"/>
-            <a:ext cx="548640" cy="762000"/>
+            <a:off x="731520" y="5379720"/>
+            <a:ext cx="548640" cy="682752"/>
           </a:xfrm>
           <a:prstGeom prst="rect">
             <a:avLst/>
@@ -10366,8 +10366,8 @@
         </p:nvSpPr>
         <p:spPr>
           <a:xfrm>
-            <a:off x="1463040" y="5775960"/>
-            <a:ext cx="9966960" cy="762000"/>
+            <a:off x="1463040" y="5379720"/>
+            <a:ext cx="9966960" cy="682752"/>
           </a:xfrm>
           <a:prstGeom prst="rect">
             <a:avLst/>
